--- a/Documentos/Banner/Banner_FECAP_ADS1_Projeto1.pptx
+++ b/Documentos/Banner/Banner_FECAP_ADS1_Projeto1.pptx
@@ -17052,7 +17052,7 @@
         <p:spPr>
           <a:xfrm>
             <a:off x="15966975" y="31986551"/>
-            <a:ext cx="11400000" cy="2745300"/>
+            <a:ext cx="11400000" cy="5676000"/>
           </a:xfrm>
           <a:prstGeom prst="rect">
             <a:avLst/>
@@ -17090,6 +17090,50 @@
               <a:t>MESSIER DATA &amp; CREATIVE. Projeto Interdisciplinar: Aplicativo Desktop para Gestão de Assinaturas de Jogos Educacionais. 2026. </a:t>
             </a:r>
             <a:endParaRPr sz="3430"/>
+          </a:p>
+          <a:p>
+            <a:pPr indent="0" lvl="0" marL="0" marR="0" rtl="0" algn="just">
+              <a:lnSpc>
+                <a:spcPct val="140000"/>
+              </a:lnSpc>
+              <a:spcBef>
+                <a:spcPts val="0"/>
+              </a:spcBef>
+              <a:spcAft>
+                <a:spcPts val="0"/>
+              </a:spcAft>
+              <a:buClr>
+                <a:srgbClr val="000000"/>
+              </a:buClr>
+              <a:buSzPts val="3430"/>
+              <a:buFont typeface="Arial"/>
+              <a:buNone/>
+            </a:pPr>
+            <a:r>
+              <a:rPr lang="en-US" sz="3400">
+                <a:solidFill>
+                  <a:schemeClr val="dk1"/>
+                </a:solidFill>
+              </a:rPr>
+              <a:t>KNAPP, Jake; ZERATSKY, John; KOWITZ, Braden. </a:t>
+            </a:r>
+            <a:r>
+              <a:rPr i="1" lang="en-US" sz="3400">
+                <a:solidFill>
+                  <a:schemeClr val="dk1"/>
+                </a:solidFill>
+              </a:rPr>
+              <a:t>Sprint: o método usado no Google para testar e aplicar novas ideias em apenas cinco dias</a:t>
+            </a:r>
+            <a:r>
+              <a:rPr lang="en-US" sz="3400">
+                <a:solidFill>
+                  <a:schemeClr val="dk1"/>
+                </a:solidFill>
+              </a:rPr>
+              <a:t>. Rio de Janeiro: Intrínseca, 2017. </a:t>
+            </a:r>
+            <a:endParaRPr sz="3400"/>
           </a:p>
           <a:p>
             <a:pPr indent="0" lvl="0" marL="0" marR="0" rtl="0" algn="just">
@@ -17184,7 +17228,15 @@
             </a:pPr>
             <a:r>
               <a:rPr lang="en-US" sz="3430"/>
-              <a:t> • Linguagem C# (.NET)</a:t>
+              <a:t> • Linguagem </a:t>
+            </a:r>
+            <a:r>
+              <a:rPr lang="en-US" sz="3430"/>
+              <a:t>utilizada no projeto:</a:t>
+            </a:r>
+            <a:r>
+              <a:rPr lang="en-US" sz="3430"/>
+              <a:t> C# (.NET)</a:t>
             </a:r>
             <a:br>
               <a:rPr lang="en-US" sz="3430"/>
@@ -17855,8 +17907,12 @@
               <a:t>• </a:t>
             </a:r>
             <a:r>
-              <a:rPr lang="en-US" sz="3430"/>
-              <a:t>Cadastro de escolas, jogos e pacotes</a:t>
+              <a:rPr lang="en-US" sz="3430">
+                <a:solidFill>
+                  <a:schemeClr val="dk1"/>
+                </a:solidFill>
+              </a:rPr>
+              <a:t>Respostas rápida</a:t>
             </a:r>
             <a:endParaRPr sz="3430"/>
           </a:p>
